--- a/output/wordlabs-suggest-3day.pptx
+++ b/output/wordlabs-suggest-3day.pptx
@@ -6040,7 +6040,7 @@
                 <a:ea typeface="Calibri" pitchFamily="34" charset="-122"/>
                 <a:cs typeface="Calibri" pitchFamily="34" charset="-120"/>
               </a:rPr>
-              <a:t>Can you make a </a:t>
+              <a:t>Tom made a helpful </a:t>
             </a:r>
             <a:pPr algn="l" indent="0" marL="0">
               <a:buNone/>
@@ -6071,7 +6071,7 @@
                 <a:ea typeface="Calibri" pitchFamily="34" charset="-122"/>
                 <a:cs typeface="Calibri" pitchFamily="34" charset="-120"/>
               </a:rPr>
-              <a:t>, or are you </a:t>
+              <a:t>, and his teacher agreed that </a:t>
             </a:r>
             <a:pPr algn="l" indent="0" marL="0">
               <a:buNone/>
@@ -6102,7 +6102,7 @@
                 <a:ea typeface="Calibri" pitchFamily="34" charset="-122"/>
                 <a:cs typeface="Calibri" pitchFamily="34" charset="-120"/>
               </a:rPr>
-              <a:t> we just wait?</a:t>
+              <a:t> new ideas was always welcome.</a:t>
             </a:r>
             <a:endParaRPr lang="en-US" sz="1800" dirty="0"/>
           </a:p>
@@ -12756,7 +12756,7 @@
                 <a:ea typeface="Calibri" pitchFamily="34" charset="-122"/>
                 <a:cs typeface="Calibri" pitchFamily="34" charset="-120"/>
               </a:rPr>
-              <a:t>ongoing action</a:t>
+              <a:t>action happening now</a:t>
             </a:r>
             <a:endParaRPr lang="en-US" sz="850" dirty="0"/>
           </a:p>
@@ -13741,7 +13741,7 @@
                 <a:ea typeface="Calibri" pitchFamily="34" charset="-122"/>
                 <a:cs typeface="Calibri" pitchFamily="34" charset="-120"/>
               </a:rPr>
-              <a:t>ongoing action</a:t>
+              <a:t>action happening now</a:t>
             </a:r>
             <a:endParaRPr lang="en-US" sz="850" dirty="0"/>
           </a:p>
@@ -15228,7 +15228,7 @@
                 <a:ea typeface="Calibri" pitchFamily="34" charset="-122"/>
                 <a:cs typeface="Calibri" pitchFamily="34" charset="-120"/>
               </a:rPr>
-              <a:t>ongoing action</a:t>
+              <a:t>action happening now</a:t>
             </a:r>
             <a:endParaRPr lang="en-US" sz="850" dirty="0"/>
           </a:p>
@@ -17544,7 +17544,7 @@
                 <a:ea typeface="Calibri" pitchFamily="34" charset="-122"/>
                 <a:cs typeface="Calibri" pitchFamily="34" charset="-120"/>
               </a:rPr>
-              <a:t>Her </a:t>
+              <a:t>The </a:t>
             </a:r>
             <a:pPr algn="l" indent="0" marL="0">
               <a:buNone/>
@@ -17561,7 +17561,7 @@
                 <a:ea typeface="Calibri" pitchFamily="34" charset="-122"/>
                 <a:cs typeface="Calibri" pitchFamily="34" charset="-120"/>
               </a:rPr>
-              <a:t>suggestion</a:t>
+              <a:t>suggested</a:t>
             </a:r>
             <a:pPr algn="l" indent="0" marL="0">
               <a:buNone/>
@@ -17575,7 +17575,7 @@
                 <a:ea typeface="Calibri" pitchFamily="34" charset="-122"/>
                 <a:cs typeface="Calibri" pitchFamily="34" charset="-120"/>
               </a:rPr>
-              <a:t> was helpful, but he kept </a:t>
+              <a:t> activities were fun; however, the most </a:t>
             </a:r>
             <a:pPr algn="l" indent="0" marL="0">
               <a:buNone/>
@@ -17592,7 +17592,7 @@
                 <a:ea typeface="Calibri" pitchFamily="34" charset="-122"/>
                 <a:cs typeface="Calibri" pitchFamily="34" charset="-120"/>
               </a:rPr>
-              <a:t>suggesting</a:t>
+              <a:t>suggestible</a:t>
             </a:r>
             <a:pPr algn="l" indent="0" marL="0">
               <a:buNone/>
@@ -17606,7 +17606,7 @@
                 <a:ea typeface="Calibri" pitchFamily="34" charset="-122"/>
                 <a:cs typeface="Calibri" pitchFamily="34" charset="-120"/>
               </a:rPr>
-              <a:t> changes, which made the process feel too </a:t>
+              <a:t> students tried everything, which shows how </a:t>
             </a:r>
             <a:pPr algn="l" indent="0" marL="0">
               <a:buNone/>
@@ -17637,7 +17637,7 @@
                 <a:ea typeface="Calibri" pitchFamily="34" charset="-122"/>
                 <a:cs typeface="Calibri" pitchFamily="34" charset="-120"/>
               </a:rPr>
-              <a:t> of his own plan.</a:t>
+              <a:t> a good idea can be!</a:t>
             </a:r>
             <a:endParaRPr lang="en-US" sz="1800" dirty="0"/>
           </a:p>
@@ -17792,7 +17792,7 @@
                 <a:ea typeface="Trebuchet MS" pitchFamily="34" charset="-122"/>
                 <a:cs typeface="Trebuchet MS" pitchFamily="34" charset="-120"/>
               </a:rPr>
-              <a:t>suggestion</a:t>
+              <a:t>suggested</a:t>
             </a:r>
             <a:endParaRPr lang="en-US" sz="1400" dirty="0"/>
           </a:p>
@@ -17920,7 +17920,7 @@
                 <a:ea typeface="Trebuchet MS" pitchFamily="34" charset="-122"/>
                 <a:cs typeface="Trebuchet MS" pitchFamily="34" charset="-120"/>
               </a:rPr>
-              <a:t>suggesting</a:t>
+              <a:t>suggestible</a:t>
             </a:r>
             <a:endParaRPr lang="en-US" sz="1400" dirty="0"/>
           </a:p>
@@ -18518,7 +18518,7 @@
                 <a:ea typeface="Trebuchet MS" pitchFamily="34" charset="-122"/>
                 <a:cs typeface="Trebuchet MS" pitchFamily="34" charset="-120"/>
               </a:rPr>
-              <a:t>suggestion</a:t>
+              <a:t>suggested</a:t>
             </a:r>
             <a:endParaRPr lang="en-US" sz="2800" dirty="0"/>
           </a:p>
@@ -19345,7 +19345,7 @@
                 <a:ea typeface="Trebuchet MS" pitchFamily="34" charset="-122"/>
                 <a:cs typeface="Trebuchet MS" pitchFamily="34" charset="-120"/>
               </a:rPr>
-              <a:t>suggestion</a:t>
+              <a:t>suggested</a:t>
             </a:r>
             <a:endParaRPr lang="en-US" sz="2800" dirty="0"/>
           </a:p>
@@ -19596,7 +19596,7 @@
                 <a:ea typeface="Trebuchet MS" pitchFamily="34" charset="-122"/>
                 <a:cs typeface="Trebuchet MS" pitchFamily="34" charset="-120"/>
               </a:rPr>
-              <a:t>ion</a:t>
+              <a:t>ed</a:t>
             </a:r>
             <a:endParaRPr lang="en-US" sz="1300" dirty="0"/>
           </a:p>
@@ -19635,7 +19635,7 @@
                 <a:ea typeface="Calibri" pitchFamily="34" charset="-122"/>
                 <a:cs typeface="Calibri" pitchFamily="34" charset="-120"/>
               </a:rPr>
-              <a:t>act or result of</a:t>
+              <a:t>in the past</a:t>
             </a:r>
             <a:endParaRPr lang="en-US" sz="850" dirty="0"/>
           </a:p>
@@ -20330,7 +20330,7 @@
                 <a:ea typeface="Trebuchet MS" pitchFamily="34" charset="-122"/>
                 <a:cs typeface="Trebuchet MS" pitchFamily="34" charset="-120"/>
               </a:rPr>
-              <a:t>suggestion</a:t>
+              <a:t>suggested</a:t>
             </a:r>
             <a:endParaRPr lang="en-US" sz="2800" dirty="0"/>
           </a:p>
@@ -20581,7 +20581,7 @@
                 <a:ea typeface="Trebuchet MS" pitchFamily="34" charset="-122"/>
                 <a:cs typeface="Trebuchet MS" pitchFamily="34" charset="-120"/>
               </a:rPr>
-              <a:t>ion</a:t>
+              <a:t>ed</a:t>
             </a:r>
             <a:endParaRPr lang="en-US" sz="1300" dirty="0"/>
           </a:p>
@@ -20620,7 +20620,7 @@
                 <a:ea typeface="Calibri" pitchFamily="34" charset="-122"/>
                 <a:cs typeface="Calibri" pitchFamily="34" charset="-120"/>
               </a:rPr>
-              <a:t>act or result of</a:t>
+              <a:t>in the past</a:t>
             </a:r>
             <a:endParaRPr lang="en-US" sz="850" dirty="0"/>
           </a:p>
@@ -20884,7 +20884,7 @@
                 <a:ea typeface="Trebuchet MS" pitchFamily="34" charset="-122"/>
                 <a:cs typeface="Trebuchet MS" pitchFamily="34" charset="-120"/>
               </a:rPr>
-              <a:t>ges</a:t>
+              <a:t>gest</a:t>
             </a:r>
             <a:endParaRPr lang="en-US" sz="1400" dirty="0"/>
           </a:p>
@@ -20989,7 +20989,7 @@
                 <a:ea typeface="Trebuchet MS" pitchFamily="34" charset="-122"/>
                 <a:cs typeface="Trebuchet MS" pitchFamily="34" charset="-120"/>
               </a:rPr>
-              <a:t>tion</a:t>
+              <a:t>ed</a:t>
             </a:r>
             <a:endParaRPr lang="en-US" sz="1400" dirty="0"/>
           </a:p>
@@ -21552,7 +21552,7 @@
                 <a:ea typeface="Trebuchet MS" pitchFamily="34" charset="-122"/>
                 <a:cs typeface="Trebuchet MS" pitchFamily="34" charset="-120"/>
               </a:rPr>
-              <a:t>suggestion</a:t>
+              <a:t>suggested</a:t>
             </a:r>
             <a:endParaRPr lang="en-US" sz="2800" dirty="0"/>
           </a:p>
@@ -21803,7 +21803,7 @@
                 <a:ea typeface="Trebuchet MS" pitchFamily="34" charset="-122"/>
                 <a:cs typeface="Trebuchet MS" pitchFamily="34" charset="-120"/>
               </a:rPr>
-              <a:t>ion</a:t>
+              <a:t>ed</a:t>
             </a:r>
             <a:endParaRPr lang="en-US" sz="1300" dirty="0"/>
           </a:p>
@@ -21842,7 +21842,7 @@
                 <a:ea typeface="Calibri" pitchFamily="34" charset="-122"/>
                 <a:cs typeface="Calibri" pitchFamily="34" charset="-120"/>
               </a:rPr>
-              <a:t>act or result of</a:t>
+              <a:t>in the past</a:t>
             </a:r>
             <a:endParaRPr lang="en-US" sz="850" dirty="0"/>
           </a:p>
@@ -22106,7 +22106,7 @@
                 <a:ea typeface="Trebuchet MS" pitchFamily="34" charset="-122"/>
                 <a:cs typeface="Trebuchet MS" pitchFamily="34" charset="-120"/>
               </a:rPr>
-              <a:t>ges</a:t>
+              <a:t>gest</a:t>
             </a:r>
             <a:endParaRPr lang="en-US" sz="1400" dirty="0"/>
           </a:p>
@@ -22211,7 +22211,7 @@
                 <a:ea typeface="Trebuchet MS" pitchFamily="34" charset="-122"/>
                 <a:cs typeface="Trebuchet MS" pitchFamily="34" charset="-120"/>
               </a:rPr>
-              <a:t>tion</a:t>
+              <a:t>ed</a:t>
             </a:r>
             <a:endParaRPr lang="en-US" sz="1400" dirty="0"/>
           </a:p>
@@ -22292,11 +22292,11 @@
         <p:spPr>
           <a:xfrm>
             <a:off x="1874520" y="4096512"/>
-            <a:ext cx="6903720" cy="804672"/>
+            <a:ext cx="6903720" cy="658368"/>
           </a:xfrm>
           <a:prstGeom prst="rect">
             <a:avLst>
-              <a:gd name="adj" fmla="val 6818"/>
+              <a:gd name="adj" fmla="val 8333"/>
             </a:avLst>
           </a:prstGeom>
           <a:solidFill>
@@ -22319,11 +22319,11 @@
         <p:spPr>
           <a:xfrm>
             <a:off x="2023872" y="4169664"/>
-            <a:ext cx="685800" cy="384048"/>
+            <a:ext cx="685800" cy="475488"/>
           </a:xfrm>
           <a:prstGeom prst="rect">
             <a:avLst>
-              <a:gd name="adj" fmla="val 9524"/>
+              <a:gd name="adj" fmla="val 7692"/>
             </a:avLst>
           </a:prstGeom>
           <a:solidFill>
@@ -22346,7 +22346,7 @@
         <p:spPr>
           <a:xfrm>
             <a:off x="2023872" y="4169664"/>
-            <a:ext cx="685800" cy="384048"/>
+            <a:ext cx="685800" cy="475488"/>
           </a:xfrm>
           <a:prstGeom prst="rect">
             <a:avLst/>
@@ -22385,11 +22385,11 @@
         <p:spPr>
           <a:xfrm>
             <a:off x="2831592" y="4169664"/>
-            <a:ext cx="685800" cy="384048"/>
+            <a:ext cx="685800" cy="475488"/>
           </a:xfrm>
           <a:prstGeom prst="rect">
             <a:avLst>
-              <a:gd name="adj" fmla="val 9524"/>
+              <a:gd name="adj" fmla="val 7692"/>
             </a:avLst>
           </a:prstGeom>
           <a:solidFill>
@@ -22412,7 +22412,7 @@
         <p:spPr>
           <a:xfrm>
             <a:off x="2831592" y="4169664"/>
-            <a:ext cx="685800" cy="384048"/>
+            <a:ext cx="685800" cy="475488"/>
           </a:xfrm>
           <a:prstGeom prst="rect">
             <a:avLst/>
@@ -22451,11 +22451,11 @@
         <p:spPr>
           <a:xfrm>
             <a:off x="3639312" y="4169664"/>
-            <a:ext cx="685800" cy="384048"/>
+            <a:ext cx="685800" cy="475488"/>
           </a:xfrm>
           <a:prstGeom prst="rect">
             <a:avLst>
-              <a:gd name="adj" fmla="val 9524"/>
+              <a:gd name="adj" fmla="val 7692"/>
             </a:avLst>
           </a:prstGeom>
           <a:solidFill>
@@ -22478,7 +22478,7 @@
         <p:spPr>
           <a:xfrm>
             <a:off x="3639312" y="4169664"/>
-            <a:ext cx="685800" cy="384048"/>
+            <a:ext cx="685800" cy="475488"/>
           </a:xfrm>
           <a:prstGeom prst="rect">
             <a:avLst/>
@@ -22517,11 +22517,11 @@
         <p:spPr>
           <a:xfrm>
             <a:off x="4447032" y="4169664"/>
-            <a:ext cx="685800" cy="384048"/>
+            <a:ext cx="685800" cy="475488"/>
           </a:xfrm>
           <a:prstGeom prst="rect">
             <a:avLst>
-              <a:gd name="adj" fmla="val 9524"/>
+              <a:gd name="adj" fmla="val 7692"/>
             </a:avLst>
           </a:prstGeom>
           <a:solidFill>
@@ -22544,7 +22544,7 @@
         <p:spPr>
           <a:xfrm>
             <a:off x="4447032" y="4169664"/>
-            <a:ext cx="685800" cy="384048"/>
+            <a:ext cx="685800" cy="475488"/>
           </a:xfrm>
           <a:prstGeom prst="rect">
             <a:avLst/>
@@ -22583,11 +22583,11 @@
         <p:spPr>
           <a:xfrm>
             <a:off x="5254752" y="4169664"/>
-            <a:ext cx="685800" cy="384048"/>
+            <a:ext cx="685800" cy="475488"/>
           </a:xfrm>
           <a:prstGeom prst="rect">
             <a:avLst>
-              <a:gd name="adj" fmla="val 9524"/>
+              <a:gd name="adj" fmla="val 7692"/>
             </a:avLst>
           </a:prstGeom>
           <a:solidFill>
@@ -22610,7 +22610,7 @@
         <p:spPr>
           <a:xfrm>
             <a:off x="5254752" y="4169664"/>
-            <a:ext cx="685800" cy="384048"/>
+            <a:ext cx="685800" cy="475488"/>
           </a:xfrm>
           <a:prstGeom prst="rect">
             <a:avLst/>
@@ -22649,11 +22649,11 @@
         <p:spPr>
           <a:xfrm>
             <a:off x="6062472" y="4169664"/>
-            <a:ext cx="685800" cy="384048"/>
+            <a:ext cx="685800" cy="475488"/>
           </a:xfrm>
           <a:prstGeom prst="rect">
             <a:avLst>
-              <a:gd name="adj" fmla="val 9524"/>
+              <a:gd name="adj" fmla="val 7692"/>
             </a:avLst>
           </a:prstGeom>
           <a:solidFill>
@@ -22676,7 +22676,7 @@
         <p:spPr>
           <a:xfrm>
             <a:off x="6062472" y="4169664"/>
-            <a:ext cx="685800" cy="384048"/>
+            <a:ext cx="685800" cy="475488"/>
           </a:xfrm>
           <a:prstGeom prst="rect">
             <a:avLst/>
@@ -22708,57 +22708,18 @@
       </p:sp>
       <p:sp>
         <p:nvSpPr>
-          <p:cNvPr id="48" name="Text 46"/>
-          <p:cNvSpPr/>
-          <p:nvPr/>
-        </p:nvSpPr>
-        <p:spPr>
-          <a:xfrm>
-            <a:off x="6062472" y="4572000"/>
-            <a:ext cx="685800" cy="219456"/>
-          </a:xfrm>
-          <a:prstGeom prst="rect">
-            <a:avLst/>
-          </a:prstGeom>
-          <a:noFill/>
-          <a:ln/>
-        </p:spPr>
-        <p:txBody>
-          <a:bodyPr wrap="square" lIns="0" tIns="0" rIns="0" bIns="0" rtlCol="0" anchor="t"/>
-          <a:lstStyle/>
-          <a:p>
-            <a:pPr algn="ctr" indent="0" marL="0">
-              <a:buNone/>
-            </a:pPr>
-            <a:r>
-              <a:rPr lang="en-US" sz="750" i="1" dirty="0">
-                <a:solidFill>
-                  <a:srgbClr val="94A3B8"/>
-                </a:solidFill>
-                <a:latin typeface="Calibri" pitchFamily="34" charset="0"/>
-                <a:ea typeface="Calibri" pitchFamily="34" charset="-122"/>
-                <a:cs typeface="Calibri" pitchFamily="34" charset="-120"/>
-              </a:rPr>
-              <a:t>/sh/</a:t>
-            </a:r>
-            <a:endParaRPr lang="en-US" sz="750" dirty="0"/>
-          </a:p>
-        </p:txBody>
-      </p:sp>
-      <p:sp>
-        <p:nvSpPr>
-          <p:cNvPr id="49" name="Shape 47"/>
+          <p:cNvPr id="48" name="Shape 46"/>
           <p:cNvSpPr/>
           <p:nvPr/>
         </p:nvSpPr>
         <p:spPr>
           <a:xfrm>
             <a:off x="6870192" y="4169664"/>
-            <a:ext cx="685800" cy="384048"/>
+            <a:ext cx="685800" cy="475488"/>
           </a:xfrm>
           <a:prstGeom prst="rect">
             <a:avLst>
-              <a:gd name="adj" fmla="val 9524"/>
+              <a:gd name="adj" fmla="val 7692"/>
             </a:avLst>
           </a:prstGeom>
           <a:solidFill>
@@ -22774,14 +22735,14 @@
       </p:sp>
       <p:sp>
         <p:nvSpPr>
-          <p:cNvPr id="50" name="Text 48"/>
+          <p:cNvPr id="49" name="Text 47"/>
           <p:cNvSpPr/>
           <p:nvPr/>
         </p:nvSpPr>
         <p:spPr>
           <a:xfrm>
             <a:off x="6870192" y="4169664"/>
-            <a:ext cx="685800" cy="384048"/>
+            <a:ext cx="685800" cy="475488"/>
           </a:xfrm>
           <a:prstGeom prst="rect">
             <a:avLst/>
@@ -22805,7 +22766,7 @@
                 <a:ea typeface="Trebuchet MS" pitchFamily="34" charset="-122"/>
                 <a:cs typeface="Trebuchet MS" pitchFamily="34" charset="-120"/>
               </a:rPr>
-              <a:t>io</a:t>
+              <a:t>e</a:t>
             </a:r>
             <a:endParaRPr lang="en-US" sz="900" dirty="0"/>
           </a:p>
@@ -22813,18 +22774,18 @@
       </p:sp>
       <p:sp>
         <p:nvSpPr>
-          <p:cNvPr id="51" name="Shape 49"/>
+          <p:cNvPr id="50" name="Shape 48"/>
           <p:cNvSpPr/>
           <p:nvPr/>
         </p:nvSpPr>
         <p:spPr>
           <a:xfrm>
             <a:off x="7677912" y="4169664"/>
-            <a:ext cx="685800" cy="384048"/>
+            <a:ext cx="685800" cy="475488"/>
           </a:xfrm>
           <a:prstGeom prst="rect">
             <a:avLst>
-              <a:gd name="adj" fmla="val 9524"/>
+              <a:gd name="adj" fmla="val 7692"/>
             </a:avLst>
           </a:prstGeom>
           <a:solidFill>
@@ -22840,14 +22801,14 @@
       </p:sp>
       <p:sp>
         <p:nvSpPr>
-          <p:cNvPr id="52" name="Text 50"/>
+          <p:cNvPr id="51" name="Text 49"/>
           <p:cNvSpPr/>
           <p:nvPr/>
         </p:nvSpPr>
         <p:spPr>
           <a:xfrm>
             <a:off x="7677912" y="4169664"/>
-            <a:ext cx="685800" cy="384048"/>
+            <a:ext cx="685800" cy="475488"/>
           </a:xfrm>
           <a:prstGeom prst="rect">
             <a:avLst/>
@@ -22871,7 +22832,7 @@
                 <a:ea typeface="Trebuchet MS" pitchFamily="34" charset="-122"/>
                 <a:cs typeface="Trebuchet MS" pitchFamily="34" charset="-120"/>
               </a:rPr>
-              <a:t>n</a:t>
+              <a:t>d</a:t>
             </a:r>
             <a:endParaRPr lang="en-US" sz="900" dirty="0"/>
           </a:p>
@@ -23302,7 +23263,7 @@
                 <a:ea typeface="Trebuchet MS" pitchFamily="34" charset="-122"/>
                 <a:cs typeface="Trebuchet MS" pitchFamily="34" charset="-120"/>
               </a:rPr>
-              <a:t>suggesting</a:t>
+              <a:t>suggestible</a:t>
             </a:r>
             <a:endParaRPr lang="en-US" sz="2800" dirty="0"/>
           </a:p>
@@ -24129,7 +24090,7 @@
                 <a:ea typeface="Trebuchet MS" pitchFamily="34" charset="-122"/>
                 <a:cs typeface="Trebuchet MS" pitchFamily="34" charset="-120"/>
               </a:rPr>
-              <a:t>suggesting</a:t>
+              <a:t>suggestible</a:t>
             </a:r>
             <a:endParaRPr lang="en-US" sz="2800" dirty="0"/>
           </a:p>
@@ -24380,7 +24341,7 @@
                 <a:ea typeface="Trebuchet MS" pitchFamily="34" charset="-122"/>
                 <a:cs typeface="Trebuchet MS" pitchFamily="34" charset="-120"/>
               </a:rPr>
-              <a:t>ing</a:t>
+              <a:t>ible</a:t>
             </a:r>
             <a:endParaRPr lang="en-US" sz="1300" dirty="0"/>
           </a:p>
@@ -24419,7 +24380,7 @@
                 <a:ea typeface="Calibri" pitchFamily="34" charset="-122"/>
                 <a:cs typeface="Calibri" pitchFamily="34" charset="-120"/>
               </a:rPr>
-              <a:t>ongoing action</a:t>
+              <a:t>able to be</a:t>
             </a:r>
             <a:endParaRPr lang="en-US" sz="850" dirty="0"/>
           </a:p>
@@ -25833,7 +25794,7 @@
                 <a:ea typeface="Trebuchet MS" pitchFamily="34" charset="-122"/>
                 <a:cs typeface="Trebuchet MS" pitchFamily="34" charset="-120"/>
               </a:rPr>
-              <a:t>suggesting</a:t>
+              <a:t>suggestible</a:t>
             </a:r>
             <a:endParaRPr lang="en-US" sz="2800" dirty="0"/>
           </a:p>
@@ -26084,7 +26045,7 @@
                 <a:ea typeface="Trebuchet MS" pitchFamily="34" charset="-122"/>
                 <a:cs typeface="Trebuchet MS" pitchFamily="34" charset="-120"/>
               </a:rPr>
-              <a:t>ing</a:t>
+              <a:t>ible</a:t>
             </a:r>
             <a:endParaRPr lang="en-US" sz="1300" dirty="0"/>
           </a:p>
@@ -26123,7 +26084,7 @@
                 <a:ea typeface="Calibri" pitchFamily="34" charset="-122"/>
                 <a:cs typeface="Calibri" pitchFamily="34" charset="-120"/>
               </a:rPr>
-              <a:t>ongoing action</a:t>
+              <a:t>able to be</a:t>
             </a:r>
             <a:endParaRPr lang="en-US" sz="850" dirty="0"/>
           </a:p>
@@ -26230,8 +26191,8 @@
         </p:nvSpPr>
         <p:spPr>
           <a:xfrm>
-            <a:off x="2313432" y="3364992"/>
-            <a:ext cx="1645920" cy="475488"/>
+            <a:off x="1975104" y="3364992"/>
+            <a:ext cx="1554480" cy="475488"/>
           </a:xfrm>
           <a:prstGeom prst="rect">
             <a:avLst>
@@ -26257,8 +26218,8 @@
         </p:nvSpPr>
         <p:spPr>
           <a:xfrm>
-            <a:off x="2313432" y="3364992"/>
-            <a:ext cx="1645920" cy="475488"/>
+            <a:off x="1975104" y="3364992"/>
+            <a:ext cx="1554480" cy="475488"/>
           </a:xfrm>
           <a:prstGeom prst="rect">
             <a:avLst/>
@@ -26296,8 +26257,8 @@
         </p:nvSpPr>
         <p:spPr>
           <a:xfrm>
-            <a:off x="3959352" y="3364992"/>
-            <a:ext cx="411480" cy="475488"/>
+            <a:off x="3529584" y="3364992"/>
+            <a:ext cx="73152" cy="475488"/>
           </a:xfrm>
           <a:prstGeom prst="rect">
             <a:avLst/>
@@ -26335,8 +26296,8 @@
         </p:nvSpPr>
         <p:spPr>
           <a:xfrm>
-            <a:off x="4370832" y="3364992"/>
-            <a:ext cx="1645920" cy="475488"/>
+            <a:off x="3602736" y="3364992"/>
+            <a:ext cx="1554480" cy="475488"/>
           </a:xfrm>
           <a:prstGeom prst="rect">
             <a:avLst>
@@ -26362,8 +26323,8 @@
         </p:nvSpPr>
         <p:spPr>
           <a:xfrm>
-            <a:off x="4370832" y="3364992"/>
-            <a:ext cx="1645920" cy="475488"/>
+            <a:off x="3602736" y="3364992"/>
+            <a:ext cx="1554480" cy="475488"/>
           </a:xfrm>
           <a:prstGeom prst="rect">
             <a:avLst/>
@@ -26401,8 +26362,8 @@
         </p:nvSpPr>
         <p:spPr>
           <a:xfrm>
-            <a:off x="6016752" y="3364992"/>
-            <a:ext cx="411480" cy="475488"/>
+            <a:off x="5157216" y="3364992"/>
+            <a:ext cx="73152" cy="475488"/>
           </a:xfrm>
           <a:prstGeom prst="rect">
             <a:avLst/>
@@ -26440,8 +26401,8 @@
         </p:nvSpPr>
         <p:spPr>
           <a:xfrm>
-            <a:off x="6428232" y="3364992"/>
-            <a:ext cx="1645920" cy="475488"/>
+            <a:off x="5230368" y="3364992"/>
+            <a:ext cx="1554480" cy="475488"/>
           </a:xfrm>
           <a:prstGeom prst="rect">
             <a:avLst>
@@ -26467,8 +26428,8 @@
         </p:nvSpPr>
         <p:spPr>
           <a:xfrm>
-            <a:off x="6428232" y="3364992"/>
-            <a:ext cx="1645920" cy="475488"/>
+            <a:off x="5230368" y="3364992"/>
+            <a:ext cx="1554480" cy="475488"/>
           </a:xfrm>
           <a:prstGeom prst="rect">
             <a:avLst/>
@@ -26492,7 +26453,7 @@
                 <a:ea typeface="Trebuchet MS" pitchFamily="34" charset="-122"/>
                 <a:cs typeface="Trebuchet MS" pitchFamily="34" charset="-120"/>
               </a:rPr>
-              <a:t>ing</a:t>
+              <a:t>i</a:t>
             </a:r>
             <a:endParaRPr lang="en-US" sz="1400" dirty="0"/>
           </a:p>
@@ -26500,7 +26461,112 @@
       </p:sp>
       <p:sp>
         <p:nvSpPr>
-          <p:cNvPr id="33" name="Shape 31"/>
+          <p:cNvPr id="33" name="Text 31"/>
+          <p:cNvSpPr/>
+          <p:nvPr/>
+        </p:nvSpPr>
+        <p:spPr>
+          <a:xfrm>
+            <a:off x="6784848" y="3364992"/>
+            <a:ext cx="73152" cy="475488"/>
+          </a:xfrm>
+          <a:prstGeom prst="rect">
+            <a:avLst/>
+          </a:prstGeom>
+          <a:noFill/>
+          <a:ln/>
+        </p:spPr>
+        <p:txBody>
+          <a:bodyPr wrap="square" lIns="0" tIns="0" rIns="0" bIns="0" rtlCol="0" anchor="ctr"/>
+          <a:lstStyle/>
+          <a:p>
+            <a:pPr algn="ctr" indent="0" marL="0">
+              <a:buNone/>
+            </a:pPr>
+            <a:r>
+              <a:rPr lang="en-US" sz="1600" b="1" dirty="0">
+                <a:solidFill>
+                  <a:srgbClr val="0D9488"/>
+                </a:solidFill>
+                <a:latin typeface="Trebuchet MS" pitchFamily="34" charset="0"/>
+                <a:ea typeface="Trebuchet MS" pitchFamily="34" charset="-122"/>
+                <a:cs typeface="Trebuchet MS" pitchFamily="34" charset="-120"/>
+              </a:rPr>
+              <a:t>·</a:t>
+            </a:r>
+            <a:endParaRPr lang="en-US" sz="1600" dirty="0"/>
+          </a:p>
+        </p:txBody>
+      </p:sp>
+      <p:sp>
+        <p:nvSpPr>
+          <p:cNvPr id="34" name="Shape 32"/>
+          <p:cNvSpPr/>
+          <p:nvPr/>
+        </p:nvSpPr>
+        <p:spPr>
+          <a:xfrm>
+            <a:off x="6858000" y="3364992"/>
+            <a:ext cx="1554480" cy="475488"/>
+          </a:xfrm>
+          <a:prstGeom prst="rect">
+            <a:avLst>
+              <a:gd name="adj" fmla="val 9615"/>
+            </a:avLst>
+          </a:prstGeom>
+          <a:solidFill>
+            <a:srgbClr val="FFFFFF"/>
+          </a:solidFill>
+          <a:ln w="12700">
+            <a:solidFill>
+              <a:srgbClr val="0D9488"/>
+            </a:solidFill>
+            <a:prstDash val="solid"/>
+          </a:ln>
+        </p:spPr>
+      </p:sp>
+      <p:sp>
+        <p:nvSpPr>
+          <p:cNvPr id="35" name="Text 33"/>
+          <p:cNvSpPr/>
+          <p:nvPr/>
+        </p:nvSpPr>
+        <p:spPr>
+          <a:xfrm>
+            <a:off x="6858000" y="3364992"/>
+            <a:ext cx="1554480" cy="475488"/>
+          </a:xfrm>
+          <a:prstGeom prst="rect">
+            <a:avLst/>
+          </a:prstGeom>
+          <a:noFill/>
+          <a:ln/>
+        </p:spPr>
+        <p:txBody>
+          <a:bodyPr wrap="square" lIns="0" tIns="0" rIns="0" bIns="0" rtlCol="0" anchor="ctr"/>
+          <a:lstStyle/>
+          <a:p>
+            <a:pPr algn="ctr" indent="0" marL="0">
+              <a:buNone/>
+            </a:pPr>
+            <a:r>
+              <a:rPr lang="en-US" sz="1400" b="1" dirty="0">
+                <a:solidFill>
+                  <a:srgbClr val="0D9488"/>
+                </a:solidFill>
+                <a:latin typeface="Trebuchet MS" pitchFamily="34" charset="0"/>
+                <a:ea typeface="Trebuchet MS" pitchFamily="34" charset="-122"/>
+                <a:cs typeface="Trebuchet MS" pitchFamily="34" charset="-120"/>
+              </a:rPr>
+              <a:t>ble</a:t>
+            </a:r>
+            <a:endParaRPr lang="en-US" sz="1400" dirty="0"/>
+          </a:p>
+        </p:txBody>
+      </p:sp>
+      <p:sp>
+        <p:nvSpPr>
+          <p:cNvPr id="36" name="Shape 34"/>
           <p:cNvSpPr/>
           <p:nvPr/>
         </p:nvSpPr>
@@ -26527,7 +26593,7 @@
       </p:sp>
       <p:sp>
         <p:nvSpPr>
-          <p:cNvPr id="34" name="Text 32"/>
+          <p:cNvPr id="37" name="Text 35"/>
           <p:cNvSpPr/>
           <p:nvPr/>
         </p:nvSpPr>
@@ -26566,7 +26632,7 @@
       </p:sp>
       <p:sp>
         <p:nvSpPr>
-          <p:cNvPr id="35" name="Shape 33"/>
+          <p:cNvPr id="38" name="Shape 36"/>
           <p:cNvSpPr/>
           <p:nvPr/>
         </p:nvSpPr>
@@ -26593,7 +26659,7 @@
       </p:sp>
       <p:sp>
         <p:nvSpPr>
-          <p:cNvPr id="36" name="Text 34"/>
+          <p:cNvPr id="39" name="Text 37"/>
           <p:cNvSpPr/>
           <p:nvPr/>
         </p:nvSpPr>
@@ -27055,7 +27121,7 @@
                 <a:ea typeface="Trebuchet MS" pitchFamily="34" charset="-122"/>
                 <a:cs typeface="Trebuchet MS" pitchFamily="34" charset="-120"/>
               </a:rPr>
-              <a:t>suggesting</a:t>
+              <a:t>suggestible</a:t>
             </a:r>
             <a:endParaRPr lang="en-US" sz="2800" dirty="0"/>
           </a:p>
@@ -27306,7 +27372,7 @@
                 <a:ea typeface="Trebuchet MS" pitchFamily="34" charset="-122"/>
                 <a:cs typeface="Trebuchet MS" pitchFamily="34" charset="-120"/>
               </a:rPr>
-              <a:t>ing</a:t>
+              <a:t>ible</a:t>
             </a:r>
             <a:endParaRPr lang="en-US" sz="1300" dirty="0"/>
           </a:p>
@@ -27345,7 +27411,7 @@
                 <a:ea typeface="Calibri" pitchFamily="34" charset="-122"/>
                 <a:cs typeface="Calibri" pitchFamily="34" charset="-120"/>
               </a:rPr>
-              <a:t>ongoing action</a:t>
+              <a:t>able to be</a:t>
             </a:r>
             <a:endParaRPr lang="en-US" sz="850" dirty="0"/>
           </a:p>
@@ -27452,8 +27518,8 @@
         </p:nvSpPr>
         <p:spPr>
           <a:xfrm>
-            <a:off x="2313432" y="3364992"/>
-            <a:ext cx="1645920" cy="475488"/>
+            <a:off x="1975104" y="3364992"/>
+            <a:ext cx="1554480" cy="475488"/>
           </a:xfrm>
           <a:prstGeom prst="rect">
             <a:avLst>
@@ -27479,8 +27545,8 @@
         </p:nvSpPr>
         <p:spPr>
           <a:xfrm>
-            <a:off x="2313432" y="3364992"/>
-            <a:ext cx="1645920" cy="475488"/>
+            <a:off x="1975104" y="3364992"/>
+            <a:ext cx="1554480" cy="475488"/>
           </a:xfrm>
           <a:prstGeom prst="rect">
             <a:avLst/>
@@ -27518,8 +27584,8 @@
         </p:nvSpPr>
         <p:spPr>
           <a:xfrm>
-            <a:off x="3959352" y="3364992"/>
-            <a:ext cx="411480" cy="475488"/>
+            <a:off x="3529584" y="3364992"/>
+            <a:ext cx="73152" cy="475488"/>
           </a:xfrm>
           <a:prstGeom prst="rect">
             <a:avLst/>
@@ -27557,8 +27623,8 @@
         </p:nvSpPr>
         <p:spPr>
           <a:xfrm>
-            <a:off x="4370832" y="3364992"/>
-            <a:ext cx="1645920" cy="475488"/>
+            <a:off x="3602736" y="3364992"/>
+            <a:ext cx="1554480" cy="475488"/>
           </a:xfrm>
           <a:prstGeom prst="rect">
             <a:avLst>
@@ -27584,8 +27650,8 @@
         </p:nvSpPr>
         <p:spPr>
           <a:xfrm>
-            <a:off x="4370832" y="3364992"/>
-            <a:ext cx="1645920" cy="475488"/>
+            <a:off x="3602736" y="3364992"/>
+            <a:ext cx="1554480" cy="475488"/>
           </a:xfrm>
           <a:prstGeom prst="rect">
             <a:avLst/>
@@ -27623,8 +27689,8 @@
         </p:nvSpPr>
         <p:spPr>
           <a:xfrm>
-            <a:off x="6016752" y="3364992"/>
-            <a:ext cx="411480" cy="475488"/>
+            <a:off x="5157216" y="3364992"/>
+            <a:ext cx="73152" cy="475488"/>
           </a:xfrm>
           <a:prstGeom prst="rect">
             <a:avLst/>
@@ -27662,8 +27728,8 @@
         </p:nvSpPr>
         <p:spPr>
           <a:xfrm>
-            <a:off x="6428232" y="3364992"/>
-            <a:ext cx="1645920" cy="475488"/>
+            <a:off x="5230368" y="3364992"/>
+            <a:ext cx="1554480" cy="475488"/>
           </a:xfrm>
           <a:prstGeom prst="rect">
             <a:avLst>
@@ -27689,8 +27755,8 @@
         </p:nvSpPr>
         <p:spPr>
           <a:xfrm>
-            <a:off x="6428232" y="3364992"/>
-            <a:ext cx="1645920" cy="475488"/>
+            <a:off x="5230368" y="3364992"/>
+            <a:ext cx="1554480" cy="475488"/>
           </a:xfrm>
           <a:prstGeom prst="rect">
             <a:avLst/>
@@ -27714,7 +27780,7 @@
                 <a:ea typeface="Trebuchet MS" pitchFamily="34" charset="-122"/>
                 <a:cs typeface="Trebuchet MS" pitchFamily="34" charset="-120"/>
               </a:rPr>
-              <a:t>ing</a:t>
+              <a:t>i</a:t>
             </a:r>
             <a:endParaRPr lang="en-US" sz="1400" dirty="0"/>
           </a:p>
@@ -27722,7 +27788,112 @@
       </p:sp>
       <p:sp>
         <p:nvSpPr>
-          <p:cNvPr id="33" name="Shape 31"/>
+          <p:cNvPr id="33" name="Text 31"/>
+          <p:cNvSpPr/>
+          <p:nvPr/>
+        </p:nvSpPr>
+        <p:spPr>
+          <a:xfrm>
+            <a:off x="6784848" y="3364992"/>
+            <a:ext cx="73152" cy="475488"/>
+          </a:xfrm>
+          <a:prstGeom prst="rect">
+            <a:avLst/>
+          </a:prstGeom>
+          <a:noFill/>
+          <a:ln/>
+        </p:spPr>
+        <p:txBody>
+          <a:bodyPr wrap="square" lIns="0" tIns="0" rIns="0" bIns="0" rtlCol="0" anchor="ctr"/>
+          <a:lstStyle/>
+          <a:p>
+            <a:pPr algn="ctr" indent="0" marL="0">
+              <a:buNone/>
+            </a:pPr>
+            <a:r>
+              <a:rPr lang="en-US" sz="1600" b="1" dirty="0">
+                <a:solidFill>
+                  <a:srgbClr val="0D9488"/>
+                </a:solidFill>
+                <a:latin typeface="Trebuchet MS" pitchFamily="34" charset="0"/>
+                <a:ea typeface="Trebuchet MS" pitchFamily="34" charset="-122"/>
+                <a:cs typeface="Trebuchet MS" pitchFamily="34" charset="-120"/>
+              </a:rPr>
+              <a:t>·</a:t>
+            </a:r>
+            <a:endParaRPr lang="en-US" sz="1600" dirty="0"/>
+          </a:p>
+        </p:txBody>
+      </p:sp>
+      <p:sp>
+        <p:nvSpPr>
+          <p:cNvPr id="34" name="Shape 32"/>
+          <p:cNvSpPr/>
+          <p:nvPr/>
+        </p:nvSpPr>
+        <p:spPr>
+          <a:xfrm>
+            <a:off x="6858000" y="3364992"/>
+            <a:ext cx="1554480" cy="475488"/>
+          </a:xfrm>
+          <a:prstGeom prst="rect">
+            <a:avLst>
+              <a:gd name="adj" fmla="val 9615"/>
+            </a:avLst>
+          </a:prstGeom>
+          <a:solidFill>
+            <a:srgbClr val="FFFFFF"/>
+          </a:solidFill>
+          <a:ln w="12700">
+            <a:solidFill>
+              <a:srgbClr val="0D9488"/>
+            </a:solidFill>
+            <a:prstDash val="solid"/>
+          </a:ln>
+        </p:spPr>
+      </p:sp>
+      <p:sp>
+        <p:nvSpPr>
+          <p:cNvPr id="35" name="Text 33"/>
+          <p:cNvSpPr/>
+          <p:nvPr/>
+        </p:nvSpPr>
+        <p:spPr>
+          <a:xfrm>
+            <a:off x="6858000" y="3364992"/>
+            <a:ext cx="1554480" cy="475488"/>
+          </a:xfrm>
+          <a:prstGeom prst="rect">
+            <a:avLst/>
+          </a:prstGeom>
+          <a:noFill/>
+          <a:ln/>
+        </p:spPr>
+        <p:txBody>
+          <a:bodyPr wrap="square" lIns="0" tIns="0" rIns="0" bIns="0" rtlCol="0" anchor="ctr"/>
+          <a:lstStyle/>
+          <a:p>
+            <a:pPr algn="ctr" indent="0" marL="0">
+              <a:buNone/>
+            </a:pPr>
+            <a:r>
+              <a:rPr lang="en-US" sz="1400" b="1" dirty="0">
+                <a:solidFill>
+                  <a:srgbClr val="0D9488"/>
+                </a:solidFill>
+                <a:latin typeface="Trebuchet MS" pitchFamily="34" charset="0"/>
+                <a:ea typeface="Trebuchet MS" pitchFamily="34" charset="-122"/>
+                <a:cs typeface="Trebuchet MS" pitchFamily="34" charset="-120"/>
+              </a:rPr>
+              <a:t>ble</a:t>
+            </a:r>
+            <a:endParaRPr lang="en-US" sz="1400" dirty="0"/>
+          </a:p>
+        </p:txBody>
+      </p:sp>
+      <p:sp>
+        <p:nvSpPr>
+          <p:cNvPr id="36" name="Shape 34"/>
           <p:cNvSpPr/>
           <p:nvPr/>
         </p:nvSpPr>
@@ -27749,7 +27920,7 @@
       </p:sp>
       <p:sp>
         <p:nvSpPr>
-          <p:cNvPr id="34" name="Text 32"/>
+          <p:cNvPr id="37" name="Text 35"/>
           <p:cNvSpPr/>
           <p:nvPr/>
         </p:nvSpPr>
@@ -27788,7 +27959,7 @@
       </p:sp>
       <p:sp>
         <p:nvSpPr>
-          <p:cNvPr id="35" name="Shape 33"/>
+          <p:cNvPr id="38" name="Shape 36"/>
           <p:cNvSpPr/>
           <p:nvPr/>
         </p:nvSpPr>
@@ -27815,14 +27986,14 @@
       </p:sp>
       <p:sp>
         <p:nvSpPr>
-          <p:cNvPr id="36" name="Shape 34"/>
-          <p:cNvSpPr/>
-          <p:nvPr/>
-        </p:nvSpPr>
-        <p:spPr>
-          <a:xfrm>
-            <a:off x="2023872" y="4169664"/>
-            <a:ext cx="685800" cy="475488"/>
+          <p:cNvPr id="39" name="Shape 37"/>
+          <p:cNvSpPr/>
+          <p:nvPr/>
+        </p:nvSpPr>
+        <p:spPr>
+          <a:xfrm>
+            <a:off x="1951330" y="4169664"/>
+            <a:ext cx="676656" cy="475488"/>
           </a:xfrm>
           <a:prstGeom prst="rect">
             <a:avLst>
@@ -27842,14 +28013,14 @@
       </p:sp>
       <p:sp>
         <p:nvSpPr>
-          <p:cNvPr id="37" name="Text 35"/>
-          <p:cNvSpPr/>
-          <p:nvPr/>
-        </p:nvSpPr>
-        <p:spPr>
-          <a:xfrm>
-            <a:off x="2023872" y="4169664"/>
-            <a:ext cx="685800" cy="475488"/>
+          <p:cNvPr id="40" name="Text 38"/>
+          <p:cNvSpPr/>
+          <p:nvPr/>
+        </p:nvSpPr>
+        <p:spPr>
+          <a:xfrm>
+            <a:off x="1951330" y="4169664"/>
+            <a:ext cx="676656" cy="475488"/>
           </a:xfrm>
           <a:prstGeom prst="rect">
             <a:avLst/>
@@ -27881,14 +28052,14 @@
       </p:sp>
       <p:sp>
         <p:nvSpPr>
-          <p:cNvPr id="38" name="Shape 36"/>
-          <p:cNvSpPr/>
-          <p:nvPr/>
-        </p:nvSpPr>
-        <p:spPr>
-          <a:xfrm>
-            <a:off x="2831592" y="4169664"/>
-            <a:ext cx="685800" cy="475488"/>
+          <p:cNvPr id="41" name="Shape 39"/>
+          <p:cNvSpPr/>
+          <p:nvPr/>
+        </p:nvSpPr>
+        <p:spPr>
+          <a:xfrm>
+            <a:off x="2677363" y="4169664"/>
+            <a:ext cx="676656" cy="475488"/>
           </a:xfrm>
           <a:prstGeom prst="rect">
             <a:avLst>
@@ -27908,14 +28079,14 @@
       </p:sp>
       <p:sp>
         <p:nvSpPr>
-          <p:cNvPr id="39" name="Text 37"/>
-          <p:cNvSpPr/>
-          <p:nvPr/>
-        </p:nvSpPr>
-        <p:spPr>
-          <a:xfrm>
-            <a:off x="2831592" y="4169664"/>
-            <a:ext cx="685800" cy="475488"/>
+          <p:cNvPr id="42" name="Text 40"/>
+          <p:cNvSpPr/>
+          <p:nvPr/>
+        </p:nvSpPr>
+        <p:spPr>
+          <a:xfrm>
+            <a:off x="2677363" y="4169664"/>
+            <a:ext cx="676656" cy="475488"/>
           </a:xfrm>
           <a:prstGeom prst="rect">
             <a:avLst/>
@@ -27947,14 +28118,14 @@
       </p:sp>
       <p:sp>
         <p:nvSpPr>
-          <p:cNvPr id="40" name="Shape 38"/>
-          <p:cNvSpPr/>
-          <p:nvPr/>
-        </p:nvSpPr>
-        <p:spPr>
-          <a:xfrm>
-            <a:off x="3639312" y="4169664"/>
-            <a:ext cx="685800" cy="475488"/>
+          <p:cNvPr id="43" name="Shape 41"/>
+          <p:cNvSpPr/>
+          <p:nvPr/>
+        </p:nvSpPr>
+        <p:spPr>
+          <a:xfrm>
+            <a:off x="3403397" y="4169664"/>
+            <a:ext cx="676656" cy="475488"/>
           </a:xfrm>
           <a:prstGeom prst="rect">
             <a:avLst>
@@ -27974,14 +28145,14 @@
       </p:sp>
       <p:sp>
         <p:nvSpPr>
-          <p:cNvPr id="41" name="Text 39"/>
-          <p:cNvSpPr/>
-          <p:nvPr/>
-        </p:nvSpPr>
-        <p:spPr>
-          <a:xfrm>
-            <a:off x="3639312" y="4169664"/>
-            <a:ext cx="685800" cy="475488"/>
+          <p:cNvPr id="44" name="Text 42"/>
+          <p:cNvSpPr/>
+          <p:nvPr/>
+        </p:nvSpPr>
+        <p:spPr>
+          <a:xfrm>
+            <a:off x="3403397" y="4169664"/>
+            <a:ext cx="676656" cy="475488"/>
           </a:xfrm>
           <a:prstGeom prst="rect">
             <a:avLst/>
@@ -28013,14 +28184,14 @@
       </p:sp>
       <p:sp>
         <p:nvSpPr>
-          <p:cNvPr id="42" name="Shape 40"/>
-          <p:cNvSpPr/>
-          <p:nvPr/>
-        </p:nvSpPr>
-        <p:spPr>
-          <a:xfrm>
-            <a:off x="4447032" y="4169664"/>
-            <a:ext cx="685800" cy="475488"/>
+          <p:cNvPr id="45" name="Shape 43"/>
+          <p:cNvSpPr/>
+          <p:nvPr/>
+        </p:nvSpPr>
+        <p:spPr>
+          <a:xfrm>
+            <a:off x="4129430" y="4169664"/>
+            <a:ext cx="676656" cy="475488"/>
           </a:xfrm>
           <a:prstGeom prst="rect">
             <a:avLst>
@@ -28040,14 +28211,14 @@
       </p:sp>
       <p:sp>
         <p:nvSpPr>
-          <p:cNvPr id="43" name="Text 41"/>
-          <p:cNvSpPr/>
-          <p:nvPr/>
-        </p:nvSpPr>
-        <p:spPr>
-          <a:xfrm>
-            <a:off x="4447032" y="4169664"/>
-            <a:ext cx="685800" cy="475488"/>
+          <p:cNvPr id="46" name="Text 44"/>
+          <p:cNvSpPr/>
+          <p:nvPr/>
+        </p:nvSpPr>
+        <p:spPr>
+          <a:xfrm>
+            <a:off x="4129430" y="4169664"/>
+            <a:ext cx="676656" cy="475488"/>
           </a:xfrm>
           <a:prstGeom prst="rect">
             <a:avLst/>
@@ -28079,14 +28250,14 @@
       </p:sp>
       <p:sp>
         <p:nvSpPr>
-          <p:cNvPr id="44" name="Shape 42"/>
-          <p:cNvSpPr/>
-          <p:nvPr/>
-        </p:nvSpPr>
-        <p:spPr>
-          <a:xfrm>
-            <a:off x="5254752" y="4169664"/>
-            <a:ext cx="685800" cy="475488"/>
+          <p:cNvPr id="47" name="Shape 45"/>
+          <p:cNvSpPr/>
+          <p:nvPr/>
+        </p:nvSpPr>
+        <p:spPr>
+          <a:xfrm>
+            <a:off x="4855464" y="4169664"/>
+            <a:ext cx="676656" cy="475488"/>
           </a:xfrm>
           <a:prstGeom prst="rect">
             <a:avLst>
@@ -28106,14 +28277,14 @@
       </p:sp>
       <p:sp>
         <p:nvSpPr>
-          <p:cNvPr id="45" name="Text 43"/>
-          <p:cNvSpPr/>
-          <p:nvPr/>
-        </p:nvSpPr>
-        <p:spPr>
-          <a:xfrm>
-            <a:off x="5254752" y="4169664"/>
-            <a:ext cx="685800" cy="475488"/>
+          <p:cNvPr id="48" name="Text 46"/>
+          <p:cNvSpPr/>
+          <p:nvPr/>
+        </p:nvSpPr>
+        <p:spPr>
+          <a:xfrm>
+            <a:off x="4855464" y="4169664"/>
+            <a:ext cx="676656" cy="475488"/>
           </a:xfrm>
           <a:prstGeom prst="rect">
             <a:avLst/>
@@ -28145,14 +28316,14 @@
       </p:sp>
       <p:sp>
         <p:nvSpPr>
-          <p:cNvPr id="46" name="Shape 44"/>
-          <p:cNvSpPr/>
-          <p:nvPr/>
-        </p:nvSpPr>
-        <p:spPr>
-          <a:xfrm>
-            <a:off x="6062472" y="4169664"/>
-            <a:ext cx="685800" cy="475488"/>
+          <p:cNvPr id="49" name="Shape 47"/>
+          <p:cNvSpPr/>
+          <p:nvPr/>
+        </p:nvSpPr>
+        <p:spPr>
+          <a:xfrm>
+            <a:off x="5581498" y="4169664"/>
+            <a:ext cx="676656" cy="475488"/>
           </a:xfrm>
           <a:prstGeom prst="rect">
             <a:avLst>
@@ -28172,14 +28343,14 @@
       </p:sp>
       <p:sp>
         <p:nvSpPr>
-          <p:cNvPr id="47" name="Text 45"/>
-          <p:cNvSpPr/>
-          <p:nvPr/>
-        </p:nvSpPr>
-        <p:spPr>
-          <a:xfrm>
-            <a:off x="6062472" y="4169664"/>
-            <a:ext cx="685800" cy="475488"/>
+          <p:cNvPr id="50" name="Text 48"/>
+          <p:cNvSpPr/>
+          <p:nvPr/>
+        </p:nvSpPr>
+        <p:spPr>
+          <a:xfrm>
+            <a:off x="5581498" y="4169664"/>
+            <a:ext cx="676656" cy="475488"/>
           </a:xfrm>
           <a:prstGeom prst="rect">
             <a:avLst/>
@@ -28211,14 +28382,14 @@
       </p:sp>
       <p:sp>
         <p:nvSpPr>
-          <p:cNvPr id="48" name="Shape 46"/>
-          <p:cNvSpPr/>
-          <p:nvPr/>
-        </p:nvSpPr>
-        <p:spPr>
-          <a:xfrm>
-            <a:off x="6870192" y="4169664"/>
-            <a:ext cx="685800" cy="475488"/>
+          <p:cNvPr id="51" name="Shape 49"/>
+          <p:cNvSpPr/>
+          <p:nvPr/>
+        </p:nvSpPr>
+        <p:spPr>
+          <a:xfrm>
+            <a:off x="6307531" y="4169664"/>
+            <a:ext cx="676656" cy="475488"/>
           </a:xfrm>
           <a:prstGeom prst="rect">
             <a:avLst>
@@ -28238,14 +28409,14 @@
       </p:sp>
       <p:sp>
         <p:nvSpPr>
-          <p:cNvPr id="49" name="Text 47"/>
-          <p:cNvSpPr/>
-          <p:nvPr/>
-        </p:nvSpPr>
-        <p:spPr>
-          <a:xfrm>
-            <a:off x="6870192" y="4169664"/>
-            <a:ext cx="685800" cy="475488"/>
+          <p:cNvPr id="52" name="Text 50"/>
+          <p:cNvSpPr/>
+          <p:nvPr/>
+        </p:nvSpPr>
+        <p:spPr>
+          <a:xfrm>
+            <a:off x="6307531" y="4169664"/>
+            <a:ext cx="676656" cy="475488"/>
           </a:xfrm>
           <a:prstGeom prst="rect">
             <a:avLst/>
@@ -28277,14 +28448,14 @@
       </p:sp>
       <p:sp>
         <p:nvSpPr>
-          <p:cNvPr id="50" name="Shape 48"/>
-          <p:cNvSpPr/>
-          <p:nvPr/>
-        </p:nvSpPr>
-        <p:spPr>
-          <a:xfrm>
-            <a:off x="7677912" y="4169664"/>
-            <a:ext cx="685800" cy="475488"/>
+          <p:cNvPr id="53" name="Shape 51"/>
+          <p:cNvSpPr/>
+          <p:nvPr/>
+        </p:nvSpPr>
+        <p:spPr>
+          <a:xfrm>
+            <a:off x="7033565" y="4169664"/>
+            <a:ext cx="676656" cy="475488"/>
           </a:xfrm>
           <a:prstGeom prst="rect">
             <a:avLst>
@@ -28304,14 +28475,14 @@
       </p:sp>
       <p:sp>
         <p:nvSpPr>
-          <p:cNvPr id="51" name="Text 49"/>
-          <p:cNvSpPr/>
-          <p:nvPr/>
-        </p:nvSpPr>
-        <p:spPr>
-          <a:xfrm>
-            <a:off x="7677912" y="4169664"/>
-            <a:ext cx="685800" cy="475488"/>
+          <p:cNvPr id="54" name="Text 52"/>
+          <p:cNvSpPr/>
+          <p:nvPr/>
+        </p:nvSpPr>
+        <p:spPr>
+          <a:xfrm>
+            <a:off x="7033565" y="4169664"/>
+            <a:ext cx="676656" cy="475488"/>
           </a:xfrm>
           <a:prstGeom prst="rect">
             <a:avLst/>
@@ -28335,7 +28506,73 @@
                 <a:ea typeface="Trebuchet MS" pitchFamily="34" charset="-122"/>
                 <a:cs typeface="Trebuchet MS" pitchFamily="34" charset="-120"/>
               </a:rPr>
-              <a:t>ng</a:t>
+              <a:t>b</a:t>
+            </a:r>
+            <a:endParaRPr lang="en-US" sz="900" dirty="0"/>
+          </a:p>
+        </p:txBody>
+      </p:sp>
+      <p:sp>
+        <p:nvSpPr>
+          <p:cNvPr id="55" name="Shape 53"/>
+          <p:cNvSpPr/>
+          <p:nvPr/>
+        </p:nvSpPr>
+        <p:spPr>
+          <a:xfrm>
+            <a:off x="7759598" y="4169664"/>
+            <a:ext cx="676656" cy="475488"/>
+          </a:xfrm>
+          <a:prstGeom prst="rect">
+            <a:avLst>
+              <a:gd name="adj" fmla="val 7692"/>
+            </a:avLst>
+          </a:prstGeom>
+          <a:solidFill>
+            <a:srgbClr val="FFFFFF"/>
+          </a:solidFill>
+          <a:ln w="12700">
+            <a:solidFill>
+              <a:srgbClr val="DB2777"/>
+            </a:solidFill>
+            <a:prstDash val="solid"/>
+          </a:ln>
+        </p:spPr>
+      </p:sp>
+      <p:sp>
+        <p:nvSpPr>
+          <p:cNvPr id="56" name="Text 54"/>
+          <p:cNvSpPr/>
+          <p:nvPr/>
+        </p:nvSpPr>
+        <p:spPr>
+          <a:xfrm>
+            <a:off x="7759598" y="4169664"/>
+            <a:ext cx="676656" cy="475488"/>
+          </a:xfrm>
+          <a:prstGeom prst="rect">
+            <a:avLst/>
+          </a:prstGeom>
+          <a:noFill/>
+          <a:ln/>
+        </p:spPr>
+        <p:txBody>
+          <a:bodyPr wrap="square" lIns="0" tIns="0" rIns="0" bIns="0" rtlCol="0" anchor="ctr"/>
+          <a:lstStyle/>
+          <a:p>
+            <a:pPr algn="ctr" indent="0" marL="0">
+              <a:buNone/>
+            </a:pPr>
+            <a:r>
+              <a:rPr lang="en-US" sz="900" b="1" dirty="0">
+                <a:solidFill>
+                  <a:srgbClr val="9D174D"/>
+                </a:solidFill>
+                <a:latin typeface="Trebuchet MS" pitchFamily="34" charset="0"/>
+                <a:ea typeface="Trebuchet MS" pitchFamily="34" charset="-122"/>
+                <a:cs typeface="Trebuchet MS" pitchFamily="34" charset="-120"/>
+              </a:rPr>
+              <a:t>le</a:t>
             </a:r>
             <a:endParaRPr lang="en-US" sz="900" dirty="0"/>
           </a:p>
@@ -32540,11 +32777,11 @@
         <p:spPr>
           <a:xfrm>
             <a:off x="1874520" y="4096512"/>
-            <a:ext cx="6903720" cy="804672"/>
+            <a:ext cx="6903720" cy="658368"/>
           </a:xfrm>
           <a:prstGeom prst="rect">
             <a:avLst>
-              <a:gd name="adj" fmla="val 6818"/>
+              <a:gd name="adj" fmla="val 8333"/>
             </a:avLst>
           </a:prstGeom>
           <a:solidFill>
@@ -32566,12 +32803,12 @@
         </p:nvSpPr>
         <p:spPr>
           <a:xfrm>
-            <a:off x="2023872" y="4169664"/>
-            <a:ext cx="685800" cy="384048"/>
+            <a:off x="1951330" y="4169664"/>
+            <a:ext cx="676656" cy="475488"/>
           </a:xfrm>
           <a:prstGeom prst="rect">
             <a:avLst>
-              <a:gd name="adj" fmla="val 9524"/>
+              <a:gd name="adj" fmla="val 7692"/>
             </a:avLst>
           </a:prstGeom>
           <a:solidFill>
@@ -32593,8 +32830,8 @@
         </p:nvSpPr>
         <p:spPr>
           <a:xfrm>
-            <a:off x="2023872" y="4169664"/>
-            <a:ext cx="685800" cy="384048"/>
+            <a:off x="1951330" y="4169664"/>
+            <a:ext cx="676656" cy="475488"/>
           </a:xfrm>
           <a:prstGeom prst="rect">
             <a:avLst/>
@@ -32632,12 +32869,12 @@
         </p:nvSpPr>
         <p:spPr>
           <a:xfrm>
-            <a:off x="2831592" y="4169664"/>
-            <a:ext cx="685800" cy="384048"/>
+            <a:off x="2677363" y="4169664"/>
+            <a:ext cx="676656" cy="475488"/>
           </a:xfrm>
           <a:prstGeom prst="rect">
             <a:avLst>
-              <a:gd name="adj" fmla="val 9524"/>
+              <a:gd name="adj" fmla="val 7692"/>
             </a:avLst>
           </a:prstGeom>
           <a:solidFill>
@@ -32659,8 +32896,8 @@
         </p:nvSpPr>
         <p:spPr>
           <a:xfrm>
-            <a:off x="2831592" y="4169664"/>
-            <a:ext cx="685800" cy="384048"/>
+            <a:off x="2677363" y="4169664"/>
+            <a:ext cx="676656" cy="475488"/>
           </a:xfrm>
           <a:prstGeom prst="rect">
             <a:avLst/>
@@ -32698,12 +32935,12 @@
         </p:nvSpPr>
         <p:spPr>
           <a:xfrm>
-            <a:off x="3639312" y="4169664"/>
-            <a:ext cx="685800" cy="384048"/>
+            <a:off x="3403397" y="4169664"/>
+            <a:ext cx="676656" cy="475488"/>
           </a:xfrm>
           <a:prstGeom prst="rect">
             <a:avLst>
-              <a:gd name="adj" fmla="val 9524"/>
+              <a:gd name="adj" fmla="val 7692"/>
             </a:avLst>
           </a:prstGeom>
           <a:solidFill>
@@ -32725,8 +32962,8 @@
         </p:nvSpPr>
         <p:spPr>
           <a:xfrm>
-            <a:off x="3639312" y="4169664"/>
-            <a:ext cx="685800" cy="384048"/>
+            <a:off x="3403397" y="4169664"/>
+            <a:ext cx="676656" cy="475488"/>
           </a:xfrm>
           <a:prstGeom prst="rect">
             <a:avLst/>
@@ -32764,12 +33001,12 @@
         </p:nvSpPr>
         <p:spPr>
           <a:xfrm>
-            <a:off x="4447032" y="4169664"/>
-            <a:ext cx="685800" cy="384048"/>
+            <a:off x="4129430" y="4169664"/>
+            <a:ext cx="676656" cy="475488"/>
           </a:xfrm>
           <a:prstGeom prst="rect">
             <a:avLst>
-              <a:gd name="adj" fmla="val 9524"/>
+              <a:gd name="adj" fmla="val 7692"/>
             </a:avLst>
           </a:prstGeom>
           <a:solidFill>
@@ -32791,8 +33028,8 @@
         </p:nvSpPr>
         <p:spPr>
           <a:xfrm>
-            <a:off x="4447032" y="4169664"/>
-            <a:ext cx="685800" cy="384048"/>
+            <a:off x="4129430" y="4169664"/>
+            <a:ext cx="676656" cy="475488"/>
           </a:xfrm>
           <a:prstGeom prst="rect">
             <a:avLst/>
@@ -32830,12 +33067,12 @@
         </p:nvSpPr>
         <p:spPr>
           <a:xfrm>
-            <a:off x="5254752" y="4169664"/>
-            <a:ext cx="685800" cy="384048"/>
+            <a:off x="4855464" y="4169664"/>
+            <a:ext cx="676656" cy="475488"/>
           </a:xfrm>
           <a:prstGeom prst="rect">
             <a:avLst>
-              <a:gd name="adj" fmla="val 9524"/>
+              <a:gd name="adj" fmla="val 7692"/>
             </a:avLst>
           </a:prstGeom>
           <a:solidFill>
@@ -32857,8 +33094,8 @@
         </p:nvSpPr>
         <p:spPr>
           <a:xfrm>
-            <a:off x="5254752" y="4169664"/>
-            <a:ext cx="685800" cy="384048"/>
+            <a:off x="4855464" y="4169664"/>
+            <a:ext cx="676656" cy="475488"/>
           </a:xfrm>
           <a:prstGeom prst="rect">
             <a:avLst/>
@@ -32896,12 +33133,12 @@
         </p:nvSpPr>
         <p:spPr>
           <a:xfrm>
-            <a:off x="6062472" y="4169664"/>
-            <a:ext cx="685800" cy="384048"/>
+            <a:off x="5581498" y="4169664"/>
+            <a:ext cx="676656" cy="475488"/>
           </a:xfrm>
           <a:prstGeom prst="rect">
             <a:avLst>
-              <a:gd name="adj" fmla="val 9524"/>
+              <a:gd name="adj" fmla="val 7692"/>
             </a:avLst>
           </a:prstGeom>
           <a:solidFill>
@@ -32923,8 +33160,8 @@
         </p:nvSpPr>
         <p:spPr>
           <a:xfrm>
-            <a:off x="6062472" y="4169664"/>
-            <a:ext cx="685800" cy="384048"/>
+            <a:off x="5581498" y="4169664"/>
+            <a:ext cx="676656" cy="475488"/>
           </a:xfrm>
           <a:prstGeom prst="rect">
             <a:avLst/>
@@ -32962,12 +33199,12 @@
         </p:nvSpPr>
         <p:spPr>
           <a:xfrm>
-            <a:off x="6870192" y="4169664"/>
-            <a:ext cx="685800" cy="384048"/>
+            <a:off x="6307531" y="4169664"/>
+            <a:ext cx="676656" cy="475488"/>
           </a:xfrm>
           <a:prstGeom prst="rect">
             <a:avLst>
-              <a:gd name="adj" fmla="val 9524"/>
+              <a:gd name="adj" fmla="val 7692"/>
             </a:avLst>
           </a:prstGeom>
           <a:solidFill>
@@ -32989,8 +33226,8 @@
         </p:nvSpPr>
         <p:spPr>
           <a:xfrm>
-            <a:off x="6870192" y="4169664"/>
-            <a:ext cx="685800" cy="384048"/>
+            <a:off x="6307531" y="4169664"/>
+            <a:ext cx="676656" cy="475488"/>
           </a:xfrm>
           <a:prstGeom prst="rect">
             <a:avLst/>
@@ -33028,12 +33265,12 @@
         </p:nvSpPr>
         <p:spPr>
           <a:xfrm>
-            <a:off x="7677912" y="4169664"/>
-            <a:ext cx="685800" cy="384048"/>
+            <a:off x="7033565" y="4169664"/>
+            <a:ext cx="676656" cy="475488"/>
           </a:xfrm>
           <a:prstGeom prst="rect">
             <a:avLst>
-              <a:gd name="adj" fmla="val 9524"/>
+              <a:gd name="adj" fmla="val 7692"/>
             </a:avLst>
           </a:prstGeom>
           <a:solidFill>
@@ -33055,8 +33292,8 @@
         </p:nvSpPr>
         <p:spPr>
           <a:xfrm>
-            <a:off x="7677912" y="4169664"/>
-            <a:ext cx="685800" cy="384048"/>
+            <a:off x="7033565" y="4169664"/>
+            <a:ext cx="676656" cy="475488"/>
           </a:xfrm>
           <a:prstGeom prst="rect">
             <a:avLst/>
@@ -33080,7 +33317,7 @@
                 <a:ea typeface="Trebuchet MS" pitchFamily="34" charset="-122"/>
                 <a:cs typeface="Trebuchet MS" pitchFamily="34" charset="-120"/>
               </a:rPr>
-              <a:t>ve</a:t>
+              <a:t>v</a:t>
             </a:r>
             <a:endParaRPr lang="en-US" sz="900" dirty="0"/>
           </a:p>
@@ -33088,40 +33325,67 @@
       </p:sp>
       <p:sp>
         <p:nvSpPr>
-          <p:cNvPr id="52" name="Text 50"/>
-          <p:cNvSpPr/>
-          <p:nvPr/>
-        </p:nvSpPr>
-        <p:spPr>
-          <a:xfrm>
-            <a:off x="7677912" y="4572000"/>
-            <a:ext cx="685800" cy="219456"/>
-          </a:xfrm>
-          <a:prstGeom prst="rect">
-            <a:avLst/>
-          </a:prstGeom>
-          <a:noFill/>
-          <a:ln/>
-        </p:spPr>
-        <p:txBody>
-          <a:bodyPr wrap="square" lIns="0" tIns="0" rIns="0" bIns="0" rtlCol="0" anchor="t"/>
-          <a:lstStyle/>
-          <a:p>
-            <a:pPr algn="ctr" indent="0" marL="0">
-              <a:buNone/>
-            </a:pPr>
-            <a:r>
-              <a:rPr lang="en-US" sz="750" i="1" dirty="0">
-                <a:solidFill>
-                  <a:srgbClr val="94A3B8"/>
-                </a:solidFill>
-                <a:latin typeface="Calibri" pitchFamily="34" charset="0"/>
-                <a:ea typeface="Calibri" pitchFamily="34" charset="-122"/>
-                <a:cs typeface="Calibri" pitchFamily="34" charset="-120"/>
-              </a:rPr>
-              <a:t>/v/</a:t>
-            </a:r>
-            <a:endParaRPr lang="en-US" sz="750" dirty="0"/>
+          <p:cNvPr id="52" name="Shape 50"/>
+          <p:cNvSpPr/>
+          <p:nvPr/>
+        </p:nvSpPr>
+        <p:spPr>
+          <a:xfrm>
+            <a:off x="7759598" y="4169664"/>
+            <a:ext cx="676656" cy="475488"/>
+          </a:xfrm>
+          <a:prstGeom prst="rect">
+            <a:avLst>
+              <a:gd name="adj" fmla="val 7692"/>
+            </a:avLst>
+          </a:prstGeom>
+          <a:solidFill>
+            <a:srgbClr val="FFFFFF"/>
+          </a:solidFill>
+          <a:ln w="12700">
+            <a:solidFill>
+              <a:srgbClr val="DB2777"/>
+            </a:solidFill>
+            <a:prstDash val="solid"/>
+          </a:ln>
+        </p:spPr>
+      </p:sp>
+      <p:sp>
+        <p:nvSpPr>
+          <p:cNvPr id="53" name="Text 51"/>
+          <p:cNvSpPr/>
+          <p:nvPr/>
+        </p:nvSpPr>
+        <p:spPr>
+          <a:xfrm>
+            <a:off x="7759598" y="4169664"/>
+            <a:ext cx="676656" cy="475488"/>
+          </a:xfrm>
+          <a:prstGeom prst="rect">
+            <a:avLst/>
+          </a:prstGeom>
+          <a:noFill/>
+          <a:ln/>
+        </p:spPr>
+        <p:txBody>
+          <a:bodyPr wrap="square" lIns="0" tIns="0" rIns="0" bIns="0" rtlCol="0" anchor="ctr"/>
+          <a:lstStyle/>
+          <a:p>
+            <a:pPr algn="ctr" indent="0" marL="0">
+              <a:buNone/>
+            </a:pPr>
+            <a:r>
+              <a:rPr lang="en-US" sz="900" b="1" dirty="0">
+                <a:solidFill>
+                  <a:srgbClr val="9D174D"/>
+                </a:solidFill>
+                <a:latin typeface="Trebuchet MS" pitchFamily="34" charset="0"/>
+                <a:ea typeface="Trebuchet MS" pitchFamily="34" charset="-122"/>
+                <a:cs typeface="Trebuchet MS" pitchFamily="34" charset="-120"/>
+              </a:rPr>
+              <a:t>e</a:t>
+            </a:r>
+            <a:endParaRPr lang="en-US" sz="900" dirty="0"/>
           </a:p>
         </p:txBody>
       </p:sp>
@@ -34881,7 +35145,7 @@
                 <a:ea typeface="Trebuchet MS" pitchFamily="34" charset="-122"/>
                 <a:cs typeface="Trebuchet MS" pitchFamily="34" charset="-120"/>
               </a:rPr>
-              <a:t>pre-</a:t>
+              <a:t>re-</a:t>
             </a:r>
             <a:endParaRPr lang="en-US" sz="1300" dirty="0"/>
           </a:p>
@@ -35073,7 +35337,7 @@
                 <a:ea typeface="Trebuchet MS" pitchFamily="34" charset="-122"/>
                 <a:cs typeface="Trebuchet MS" pitchFamily="34" charset="-120"/>
               </a:rPr>
-              <a:t>re-</a:t>
+              <a:t>pre-</a:t>
             </a:r>
             <a:endParaRPr lang="en-US" sz="1300" dirty="0"/>
           </a:p>
@@ -35162,7 +35426,7 @@
                 <a:ea typeface="Trebuchet MS" pitchFamily="34" charset="-122"/>
                 <a:cs typeface="Trebuchet MS" pitchFamily="34" charset="-120"/>
               </a:rPr>
-              <a:t>-ed</a:t>
+              <a:t>-ive</a:t>
             </a:r>
             <a:endParaRPr lang="en-US" sz="1300" dirty="0"/>
           </a:p>
@@ -35226,7 +35490,7 @@
                 <a:ea typeface="Trebuchet MS" pitchFamily="34" charset="-122"/>
                 <a:cs typeface="Trebuchet MS" pitchFamily="34" charset="-120"/>
               </a:rPr>
-              <a:t>over-</a:t>
+              <a:t>counter-</a:t>
             </a:r>
             <a:endParaRPr lang="en-US" sz="1300" dirty="0"/>
           </a:p>
@@ -35315,7 +35579,7 @@
                 <a:ea typeface="Trebuchet MS" pitchFamily="34" charset="-122"/>
                 <a:cs typeface="Trebuchet MS" pitchFamily="34" charset="-120"/>
               </a:rPr>
-              <a:t>-ing</a:t>
+              <a:t>-ible</a:t>
             </a:r>
             <a:endParaRPr lang="en-US" sz="1300" dirty="0"/>
           </a:p>
@@ -35468,7 +35732,7 @@
                 <a:ea typeface="Trebuchet MS" pitchFamily="34" charset="-122"/>
                 <a:cs typeface="Trebuchet MS" pitchFamily="34" charset="-120"/>
               </a:rPr>
-              <a:t>-ive</a:t>
+              <a:t>-ed</a:t>
             </a:r>
             <a:endParaRPr lang="en-US" sz="1300" dirty="0"/>
           </a:p>
@@ -35532,7 +35796,7 @@
                 <a:ea typeface="Trebuchet MS" pitchFamily="34" charset="-122"/>
                 <a:cs typeface="Trebuchet MS" pitchFamily="34" charset="-120"/>
               </a:rPr>
-              <a:t>counter-</a:t>
+              <a:t>over-</a:t>
             </a:r>
             <a:endParaRPr lang="en-US" sz="1300" dirty="0"/>
           </a:p>
@@ -35621,7 +35885,7 @@
                 <a:ea typeface="Trebuchet MS" pitchFamily="34" charset="-122"/>
                 <a:cs typeface="Trebuchet MS" pitchFamily="34" charset="-120"/>
               </a:rPr>
-              <a:t>-ible</a:t>
+              <a:t>-ing</a:t>
             </a:r>
             <a:endParaRPr lang="en-US" sz="1300" dirty="0"/>
           </a:p>
@@ -35990,7 +36254,7 @@
                 <a:ea typeface="Trebuchet MS" pitchFamily="34" charset="-122"/>
                 <a:cs typeface="Trebuchet MS" pitchFamily="34" charset="-120"/>
               </a:rPr>
-              <a:t>suggestions</a:t>
+              <a:t>suggestive</a:t>
             </a:r>
             <a:endParaRPr lang="en-US" sz="1200" dirty="0"/>
           </a:p>
@@ -36056,7 +36320,7 @@
                 <a:ea typeface="Trebuchet MS" pitchFamily="34" charset="-122"/>
                 <a:cs typeface="Trebuchet MS" pitchFamily="34" charset="-120"/>
               </a:rPr>
-              <a:t>suggestive</a:t>
+              <a:t>suggestions</a:t>
             </a:r>
             <a:endParaRPr lang="en-US" sz="1200" dirty="0"/>
           </a:p>
@@ -37376,7 +37640,7 @@
                 <a:ea typeface="Calibri" pitchFamily="34" charset="-122"/>
                 <a:cs typeface="Calibri" pitchFamily="34" charset="-120"/>
               </a:rPr>
-              <a:t>1.  The word 'suggest' comes from a Latin word meaning to bring or put forward.</a:t>
+              <a:t>1.  A 'suggestion' is a noun formed by adding the suffix '-ion' to the root 'suggest'.</a:t>
             </a:r>
             <a:endParaRPr lang="en-US" sz="1300" dirty="0"/>
           </a:p>
@@ -37515,7 +37779,7 @@
                 <a:ea typeface="Calibri" pitchFamily="34" charset="-122"/>
                 <a:cs typeface="Calibri" pitchFamily="34" charset="-120"/>
               </a:rPr>
-              <a:t>2.  The word 'suggestible' means someone who never follows other people's ideas.</a:t>
+              <a:t>2.  The word 'suggestive' contains the root 'suggest' and the suffix '-ive'.</a:t>
             </a:r>
             <a:endParaRPr lang="en-US" sz="1300" dirty="0"/>
           </a:p>
@@ -37538,11 +37802,11 @@
             </a:avLst>
           </a:prstGeom>
           <a:solidFill>
-            <a:srgbClr val="FEE2E2"/>
-          </a:solidFill>
-          <a:ln w="12700">
-            <a:solidFill>
-              <a:srgbClr val="DC2626"/>
+            <a:srgbClr val="DCFCE7"/>
+          </a:solidFill>
+          <a:ln w="12700">
+            <a:solidFill>
+              <a:srgbClr val="16A34A"/>
             </a:solidFill>
             <a:prstDash val="solid"/>
           </a:ln>
@@ -37575,13 +37839,13 @@
             <a:r>
               <a:rPr lang="en-US" sz="1100" b="1" dirty="0">
                 <a:solidFill>
-                  <a:srgbClr val="DC2626"/>
+                  <a:srgbClr val="16A34A"/>
                 </a:solidFill>
                 <a:latin typeface="Trebuchet MS" pitchFamily="34" charset="0"/>
                 <a:ea typeface="Trebuchet MS" pitchFamily="34" charset="-122"/>
                 <a:cs typeface="Trebuchet MS" pitchFamily="34" charset="-120"/>
               </a:rPr>
-              <a:t>FALSE</a:t>
+              <a:t>TRUE</a:t>
             </a:r>
             <a:endParaRPr lang="en-US" sz="1100" dirty="0"/>
           </a:p>
@@ -37654,7 +37918,7 @@
                 <a:ea typeface="Calibri" pitchFamily="34" charset="-122"/>
                 <a:cs typeface="Calibri" pitchFamily="34" charset="-120"/>
               </a:rPr>
-              <a:t>3.  A 'suggestion' is a noun that names an idea put forward for others to consider.</a:t>
+              <a:t>3.  The root 'suggest' comes from a Latin word meaning to bring or carry up an idea.</a:t>
             </a:r>
             <a:endParaRPr lang="en-US" sz="1300" dirty="0"/>
           </a:p>
@@ -37793,7 +38057,7 @@
                 <a:ea typeface="Calibri" pitchFamily="34" charset="-122"/>
                 <a:cs typeface="Calibri" pitchFamily="34" charset="-120"/>
               </a:rPr>
-              <a:t>4.  Adding the suffix '-ive' to 'suggest' makes the adjective 'suggestive'.</a:t>
+              <a:t>4.  Adding the suffix '-ible' to 'suggest' makes the word 'suggestable'.</a:t>
             </a:r>
             <a:endParaRPr lang="en-US" sz="1300" dirty="0"/>
           </a:p>
@@ -37816,11 +38080,11 @@
             </a:avLst>
           </a:prstGeom>
           <a:solidFill>
-            <a:srgbClr val="DCFCE7"/>
-          </a:solidFill>
-          <a:ln w="12700">
-            <a:solidFill>
-              <a:srgbClr val="16A34A"/>
+            <a:srgbClr val="FEE2E2"/>
+          </a:solidFill>
+          <a:ln w="12700">
+            <a:solidFill>
+              <a:srgbClr val="DC2626"/>
             </a:solidFill>
             <a:prstDash val="solid"/>
           </a:ln>
@@ -37853,13 +38117,13 @@
             <a:r>
               <a:rPr lang="en-US" sz="1100" b="1" dirty="0">
                 <a:solidFill>
-                  <a:srgbClr val="16A34A"/>
+                  <a:srgbClr val="DC2626"/>
                 </a:solidFill>
                 <a:latin typeface="Trebuchet MS" pitchFamily="34" charset="0"/>
                 <a:ea typeface="Trebuchet MS" pitchFamily="34" charset="-122"/>
                 <a:cs typeface="Trebuchet MS" pitchFamily="34" charset="-120"/>
               </a:rPr>
-              <a:t>TRUE</a:t>
+              <a:t>FALSE</a:t>
             </a:r>
             <a:endParaRPr lang="en-US" sz="1100" dirty="0"/>
           </a:p>
@@ -37932,7 +38196,7 @@
                 <a:ea typeface="Calibri" pitchFamily="34" charset="-122"/>
                 <a:cs typeface="Calibri" pitchFamily="34" charset="-120"/>
               </a:rPr>
-              <a:t>5.  The root 'suggest' is originally from ancient Greek.</a:t>
+              <a:t>5.  The word 'suggesting' means that an idea has already been shared in the past.</a:t>
             </a:r>
             <a:endParaRPr lang="en-US" sz="1300" dirty="0"/>
           </a:p>
@@ -38835,7 +39099,7 @@
                 <a:ea typeface="Trebuchet MS" pitchFamily="34" charset="-122"/>
                 <a:cs typeface="Trebuchet MS" pitchFamily="34" charset="-120"/>
               </a:rPr>
-              <a:t>suggestions</a:t>
+              <a:t>suggestive</a:t>
             </a:r>
             <a:endParaRPr lang="en-US" sz="1300" dirty="0"/>
           </a:p>
@@ -38901,7 +39165,7 @@
                 <a:ea typeface="Trebuchet MS" pitchFamily="34" charset="-122"/>
                 <a:cs typeface="Trebuchet MS" pitchFamily="34" charset="-120"/>
               </a:rPr>
-              <a:t>suggestive</a:t>
+              <a:t>suggestions</a:t>
             </a:r>
             <a:endParaRPr lang="en-US" sz="1300" dirty="0"/>
           </a:p>
@@ -39560,7 +39824,7 @@
                 <a:ea typeface="Trebuchet MS" pitchFamily="34" charset="-122"/>
                 <a:cs typeface="Trebuchet MS" pitchFamily="34" charset="-120"/>
               </a:rPr>
-              <a:t>pre-</a:t>
+              <a:t>re-</a:t>
             </a:r>
             <a:endParaRPr lang="en-US" sz="1300" dirty="0"/>
           </a:p>
@@ -39752,7 +40016,7 @@
                 <a:ea typeface="Trebuchet MS" pitchFamily="34" charset="-122"/>
                 <a:cs typeface="Trebuchet MS" pitchFamily="34" charset="-120"/>
               </a:rPr>
-              <a:t>re-</a:t>
+              <a:t>pre-</a:t>
             </a:r>
             <a:endParaRPr lang="en-US" sz="1300" dirty="0"/>
           </a:p>
@@ -39841,7 +40105,7 @@
                 <a:ea typeface="Trebuchet MS" pitchFamily="34" charset="-122"/>
                 <a:cs typeface="Trebuchet MS" pitchFamily="34" charset="-120"/>
               </a:rPr>
-              <a:t>-ed</a:t>
+              <a:t>-ive</a:t>
             </a:r>
             <a:endParaRPr lang="en-US" sz="1300" dirty="0"/>
           </a:p>
@@ -39905,7 +40169,7 @@
                 <a:ea typeface="Trebuchet MS" pitchFamily="34" charset="-122"/>
                 <a:cs typeface="Trebuchet MS" pitchFamily="34" charset="-120"/>
               </a:rPr>
-              <a:t>over-</a:t>
+              <a:t>counter-</a:t>
             </a:r>
             <a:endParaRPr lang="en-US" sz="1300" dirty="0"/>
           </a:p>
@@ -39994,7 +40258,7 @@
                 <a:ea typeface="Trebuchet MS" pitchFamily="34" charset="-122"/>
                 <a:cs typeface="Trebuchet MS" pitchFamily="34" charset="-120"/>
               </a:rPr>
-              <a:t>-ing</a:t>
+              <a:t>-ible</a:t>
             </a:r>
             <a:endParaRPr lang="en-US" sz="1300" dirty="0"/>
           </a:p>
@@ -40147,7 +40411,7 @@
                 <a:ea typeface="Trebuchet MS" pitchFamily="34" charset="-122"/>
                 <a:cs typeface="Trebuchet MS" pitchFamily="34" charset="-120"/>
               </a:rPr>
-              <a:t>-ive</a:t>
+              <a:t>-ed</a:t>
             </a:r>
             <a:endParaRPr lang="en-US" sz="1300" dirty="0"/>
           </a:p>
@@ -40211,7 +40475,7 @@
                 <a:ea typeface="Trebuchet MS" pitchFamily="34" charset="-122"/>
                 <a:cs typeface="Trebuchet MS" pitchFamily="34" charset="-120"/>
               </a:rPr>
-              <a:t>counter-</a:t>
+              <a:t>over-</a:t>
             </a:r>
             <a:endParaRPr lang="en-US" sz="1300" dirty="0"/>
           </a:p>
@@ -40300,7 +40564,7 @@
                 <a:ea typeface="Trebuchet MS" pitchFamily="34" charset="-122"/>
                 <a:cs typeface="Trebuchet MS" pitchFamily="34" charset="-120"/>
               </a:rPr>
-              <a:t>-ible</a:t>
+              <a:t>-ing</a:t>
             </a:r>
             <a:endParaRPr lang="en-US" sz="1300" dirty="0"/>
           </a:p>
@@ -40354,7 +40618,7 @@
         <p:spPr>
           <a:xfrm>
             <a:off x="1508760" y="4178808"/>
-            <a:ext cx="950976" cy="420624"/>
+            <a:ext cx="822960" cy="420624"/>
           </a:xfrm>
           <a:prstGeom prst="rect">
             <a:avLst>
@@ -40388,7 +40652,7 @@
         <p:spPr>
           <a:xfrm>
             <a:off x="1508760" y="4178808"/>
-            <a:ext cx="950976" cy="420624"/>
+            <a:ext cx="822960" cy="420624"/>
           </a:xfrm>
           <a:prstGeom prst="rect">
             <a:avLst/>
@@ -40412,7 +40676,7 @@
                 <a:ea typeface="Trebuchet MS" pitchFamily="34" charset="-122"/>
                 <a:cs typeface="Trebuchet MS" pitchFamily="34" charset="-120"/>
               </a:rPr>
-              <a:t>pre-</a:t>
+              <a:t>re-</a:t>
             </a:r>
             <a:endParaRPr lang="en-US" sz="1300" dirty="0"/>
           </a:p>
@@ -40426,7 +40690,7 @@
         </p:nvSpPr>
         <p:spPr>
           <a:xfrm>
-            <a:off x="2487168" y="4178808"/>
+            <a:off x="2359152" y="4178808"/>
             <a:ext cx="320040" cy="420624"/>
           </a:xfrm>
           <a:prstGeom prst="rect">
@@ -40465,7 +40729,7 @@
         </p:nvSpPr>
         <p:spPr>
           <a:xfrm>
-            <a:off x="2834640" y="4178808"/>
+            <a:off x="2706624" y="4178808"/>
             <a:ext cx="1682496" cy="420624"/>
           </a:xfrm>
           <a:prstGeom prst="rect">
@@ -40499,7 +40763,7 @@
         </p:nvSpPr>
         <p:spPr>
           <a:xfrm>
-            <a:off x="2834640" y="4178808"/>
+            <a:off x="2706624" y="4178808"/>
             <a:ext cx="1682496" cy="420624"/>
           </a:xfrm>
           <a:prstGeom prst="rect">
@@ -40538,7 +40802,7 @@
         </p:nvSpPr>
         <p:spPr>
           <a:xfrm>
-            <a:off x="4544568" y="4178808"/>
+            <a:off x="4416552" y="4178808"/>
             <a:ext cx="320040" cy="420624"/>
           </a:xfrm>
           <a:prstGeom prst="rect">
@@ -40577,7 +40841,7 @@
         </p:nvSpPr>
         <p:spPr>
           <a:xfrm>
-            <a:off x="4892040" y="4178808"/>
+            <a:off x="4764024" y="4178808"/>
             <a:ext cx="950976" cy="420624"/>
           </a:xfrm>
           <a:prstGeom prst="rect">
@@ -40611,7 +40875,7 @@
         </p:nvSpPr>
         <p:spPr>
           <a:xfrm>
-            <a:off x="4892040" y="4178808"/>
+            <a:off x="4764024" y="4178808"/>
             <a:ext cx="950976" cy="420624"/>
           </a:xfrm>
           <a:prstGeom prst="rect">
@@ -40650,7 +40914,7 @@
         </p:nvSpPr>
         <p:spPr>
           <a:xfrm>
-            <a:off x="5916168" y="4178808"/>
+            <a:off x="5788152" y="4178808"/>
             <a:ext cx="365760" cy="420624"/>
           </a:xfrm>
           <a:prstGeom prst="rect">
@@ -40689,7 +40953,7 @@
         </p:nvSpPr>
         <p:spPr>
           <a:xfrm>
-            <a:off x="6327648" y="4178808"/>
+            <a:off x="6199632" y="4178808"/>
             <a:ext cx="2194560" cy="420624"/>
           </a:xfrm>
           <a:prstGeom prst="rect">
@@ -40716,7 +40980,7 @@
         </p:nvSpPr>
         <p:spPr>
           <a:xfrm>
-            <a:off x="6327648" y="4178808"/>
+            <a:off x="6199632" y="4178808"/>
             <a:ext cx="2194560" cy="420624"/>
           </a:xfrm>
           <a:prstGeom prst="rect">
@@ -41211,7 +41475,7 @@
                 <a:ea typeface="Calibri" pitchFamily="34" charset="-122"/>
                 <a:cs typeface="Calibri" pitchFamily="34" charset="-120"/>
               </a:rPr>
-              <a:t>Easy to influence; quick to follow other people's ideas or suggestions.</a:t>
+              <a:t>Easily influenced by other people's ideas or suggestions.</a:t>
             </a:r>
             <a:endParaRPr lang="en-US" sz="1200" dirty="0"/>
           </a:p>
@@ -41350,7 +41614,7 @@
                 <a:ea typeface="Calibri" pitchFamily="34" charset="-122"/>
                 <a:cs typeface="Calibri" pitchFamily="34" charset="-120"/>
               </a:rPr>
-              <a:t>More than one idea or plan offered for others to consider.</a:t>
+              <a:t>Something that hints at or brings an idea to mind.</a:t>
             </a:r>
             <a:endParaRPr lang="en-US" sz="1200" dirty="0"/>
           </a:p>
@@ -41489,7 +41753,7 @@
                 <a:ea typeface="Calibri" pitchFamily="34" charset="-122"/>
                 <a:cs typeface="Calibri" pitchFamily="34" charset="-120"/>
               </a:rPr>
-              <a:t>An idea or plan that someone offers for others to think about.</a:t>
+              <a:t>An idea or plan that someone puts forward for others to consider.</a:t>
             </a:r>
             <a:endParaRPr lang="en-US" sz="1200" dirty="0"/>
           </a:p>
@@ -41628,7 +41892,7 @@
                 <a:ea typeface="Calibri" pitchFamily="34" charset="-122"/>
                 <a:cs typeface="Calibri" pitchFamily="34" charset="-120"/>
               </a:rPr>
-              <a:t>Something that hints at or makes you think of a particular idea.</a:t>
+              <a:t>More than one idea or plan put forward for others to think about.</a:t>
             </a:r>
             <a:endParaRPr lang="en-US" sz="1200" dirty="0"/>
           </a:p>
@@ -41701,7 +41965,7 @@
                 <a:ea typeface="Trebuchet MS" pitchFamily="34" charset="-122"/>
                 <a:cs typeface="Trebuchet MS" pitchFamily="34" charset="-120"/>
               </a:rPr>
-              <a:t>suggestions</a:t>
+              <a:t>suggestive</a:t>
             </a:r>
             <a:endParaRPr lang="en-US" sz="1200" dirty="0"/>
           </a:p>
@@ -41767,7 +42031,7 @@
                 <a:ea typeface="Calibri" pitchFamily="34" charset="-122"/>
                 <a:cs typeface="Calibri" pitchFamily="34" charset="-120"/>
               </a:rPr>
-              <a:t>In the middle of offering an idea or recommendation to someone.</a:t>
+              <a:t>When someone is in the middle of sharing an idea or plan.</a:t>
             </a:r>
             <a:endParaRPr lang="en-US" sz="1200" dirty="0"/>
           </a:p>
@@ -41840,7 +42104,7 @@
                 <a:ea typeface="Trebuchet MS" pitchFamily="34" charset="-122"/>
                 <a:cs typeface="Trebuchet MS" pitchFamily="34" charset="-120"/>
               </a:rPr>
-              <a:t>suggestive</a:t>
+              <a:t>suggestions</a:t>
             </a:r>
             <a:endParaRPr lang="en-US" sz="1200" dirty="0"/>
           </a:p>
@@ -41906,7 +42170,7 @@
                 <a:ea typeface="Calibri" pitchFamily="34" charset="-122"/>
                 <a:cs typeface="Calibri" pitchFamily="34" charset="-120"/>
               </a:rPr>
-              <a:t>To give someone an idea or tell them what you think they should do.</a:t>
+              <a:t>To put forward an idea or plan for someone to think about.</a:t>
             </a:r>
             <a:endParaRPr lang="en-US" sz="1200" dirty="0"/>
           </a:p>
@@ -42045,7 +42309,7 @@
                 <a:ea typeface="Calibri" pitchFamily="34" charset="-122"/>
                 <a:cs typeface="Calibri" pitchFamily="34" charset="-120"/>
               </a:rPr>
-              <a:t>When someone already gave an idea or made a recommendation in the past.</a:t>
+              <a:t>When someone already shared an idea or plan in the past.</a:t>
             </a:r>
             <a:endParaRPr lang="en-US" sz="1200" dirty="0"/>
           </a:p>
@@ -42540,7 +42804,7 @@
                 <a:ea typeface="Calibri" pitchFamily="34" charset="-122"/>
                 <a:cs typeface="Calibri" pitchFamily="34" charset="-120"/>
               </a:rPr>
-              <a:t>The teacher asked everyone to write down their best suggestion for the class excursion.</a:t>
+              <a:t>Our teacher asked us to write down one suggestion for how we could improve our classroom library.</a:t>
             </a:r>
             <a:endParaRPr lang="en-US" sz="1500" dirty="0"/>
           </a:p>
@@ -42704,7 +42968,7 @@
                 <a:ea typeface="Calibri" pitchFamily="34" charset="-122"/>
                 <a:cs typeface="Calibri" pitchFamily="34" charset="-120"/>
               </a:rPr>
-              <a:t>Mia was very suggestible, so she always agreed with whatever her friends suggested.</a:t>
+              <a:t>After the storm, the weather report was suggestive of more rain coming later in the week.</a:t>
             </a:r>
             <a:endParaRPr lang="en-US" sz="1500" dirty="0"/>
           </a:p>
@@ -42868,7 +43132,7 @@
                 <a:ea typeface="Calibri" pitchFamily="34" charset="-122"/>
                 <a:cs typeface="Calibri" pitchFamily="34" charset="-120"/>
               </a:rPr>
-              <a:t>The coach made several helpful suggestions about how the team could improve their passing.</a:t>
+              <a:t>Mia kept suggesting that we play soccer at lunch instead of staying inside.</a:t>
             </a:r>
             <a:endParaRPr lang="en-US" sz="1500" dirty="0"/>
           </a:p>
